--- a/Day 16/SAP Build Training Day 16.pptx
+++ b/Day 16/SAP Build Training Day 16.pptx
@@ -14,10 +14,10 @@
     <p:sldId id="256" r:id="rId2"/>
     <p:sldId id="494" r:id="rId3"/>
     <p:sldId id="265" r:id="rId4"/>
-    <p:sldId id="388" r:id="rId5"/>
-    <p:sldId id="387" r:id="rId6"/>
-    <p:sldId id="389" r:id="rId7"/>
-    <p:sldId id="406" r:id="rId8"/>
+    <p:sldId id="386" r:id="rId5"/>
+    <p:sldId id="388" r:id="rId6"/>
+    <p:sldId id="387" r:id="rId7"/>
+    <p:sldId id="389" r:id="rId8"/>
     <p:sldId id="495" r:id="rId9"/>
     <p:sldId id="496" r:id="rId10"/>
     <p:sldId id="497" r:id="rId11"/>
@@ -234,7 +234,7 @@
           <a:p>
             <a:fld id="{74CD1819-8EAB-4094-BBB1-E11C3AABA846}" type="datetimeFigureOut">
               <a:rPr lang="en-US" smtClean="0"/>
-              <a:t>7/26/2025</a:t>
+              <a:t>8/3/2025</a:t>
             </a:fld>
             <a:endParaRPr lang="en-US"/>
           </a:p>
@@ -399,7 +399,7 @@
           <a:p>
             <a:fld id="{D976A73D-237B-4034-AB8C-962174A8D351}" type="datetimeFigureOut">
               <a:rPr lang="en-US" smtClean="0"/>
-              <a:t>7/26/2025</a:t>
+              <a:t>8/3/2025</a:t>
             </a:fld>
             <a:endParaRPr lang="en-US"/>
           </a:p>
@@ -1101,7 +1101,7 @@
             <a:fld id="{1D8BD707-D9CF-40AE-B4C6-C98DA3205C09}" type="datetimeFigureOut">
               <a:rPr lang="en-US" smtClean="0"/>
               <a:pPr/>
-              <a:t>7/26/2025</a:t>
+              <a:t>8/3/2025</a:t>
             </a:fld>
             <a:endParaRPr lang="en-US"/>
           </a:p>
@@ -4464,7 +4464,7 @@
           <a:p>
             <a:fld id="{940CB006-912F-44E1-9560-9CBFEBE946EF}" type="datetime4">
               <a:rPr lang="en-US" smtClean="0"/>
-              <a:t>July 26, 2025</a:t>
+              <a:t>August 3, 2025</a:t>
             </a:fld>
             <a:endParaRPr lang="en-US"/>
           </a:p>
@@ -9410,6 +9410,580 @@
         <p:cNvPr id="1" name="">
           <a:extLst>
             <a:ext uri="{FF2B5EF4-FFF2-40B4-BE49-F238E27FC236}">
+              <a16:creationId xmlns:a16="http://schemas.microsoft.com/office/drawing/2014/main" id="{2DD7685B-C01E-196E-00F6-D2E7ECD8B491}"/>
+            </a:ext>
+          </a:extLst>
+        </p:cNvPr>
+        <p:cNvGrpSpPr/>
+        <p:nvPr/>
+      </p:nvGrpSpPr>
+      <p:grpSpPr>
+        <a:xfrm>
+          <a:off x="0" y="0"/>
+          <a:ext cx="0" cy="0"/>
+          <a:chOff x="0" y="0"/>
+          <a:chExt cx="0" cy="0"/>
+        </a:xfrm>
+      </p:grpSpPr>
+      <p:sp>
+        <p:nvSpPr>
+          <p:cNvPr id="11" name="Title 1">
+            <a:extLst>
+              <a:ext uri="{FF2B5EF4-FFF2-40B4-BE49-F238E27FC236}">
+                <a16:creationId xmlns:a16="http://schemas.microsoft.com/office/drawing/2014/main" id="{29E8A110-23AC-4553-9F22-539172BE16F9}"/>
+              </a:ext>
+            </a:extLst>
+          </p:cNvPr>
+          <p:cNvSpPr>
+            <a:spLocks noGrp="1"/>
+          </p:cNvSpPr>
+          <p:nvPr>
+            <p:ph type="title"/>
+          </p:nvPr>
+        </p:nvSpPr>
+        <p:spPr>
+          <a:xfrm>
+            <a:off x="462280" y="236697"/>
+            <a:ext cx="8229600" cy="457200"/>
+          </a:xfrm>
+        </p:spPr>
+        <p:txBody>
+          <a:bodyPr/>
+          <a:lstStyle/>
+          <a:p>
+            <a:r>
+              <a:rPr lang="en-US" sz="2400" dirty="0">
+                <a:latin typeface="Cooper Black" panose="0208090404030B020404" pitchFamily="18" charset="0"/>
+              </a:rPr>
+              <a:t>Scenario Sales Order App UI Automation</a:t>
+            </a:r>
+          </a:p>
+        </p:txBody>
+      </p:sp>
+      <p:sp>
+        <p:nvSpPr>
+          <p:cNvPr id="3" name="Footer Placeholder 2">
+            <a:extLst>
+              <a:ext uri="{FF2B5EF4-FFF2-40B4-BE49-F238E27FC236}">
+                <a16:creationId xmlns:a16="http://schemas.microsoft.com/office/drawing/2014/main" id="{0D17813B-14E0-5A9F-CC37-0BB0D37CB6B7}"/>
+              </a:ext>
+            </a:extLst>
+          </p:cNvPr>
+          <p:cNvSpPr>
+            <a:spLocks noGrp="1"/>
+          </p:cNvSpPr>
+          <p:nvPr>
+            <p:ph type="ftr" sz="quarter" idx="11"/>
+          </p:nvPr>
+        </p:nvSpPr>
+        <p:spPr>
+          <a:xfrm>
+            <a:off x="3124200" y="4767263"/>
+            <a:ext cx="2895600" cy="273844"/>
+          </a:xfrm>
+        </p:spPr>
+        <p:txBody>
+          <a:bodyPr vert="horz" lIns="91440" tIns="45720" rIns="91440" bIns="45720" rtlCol="0" anchor="ctr">
+            <a:normAutofit/>
+          </a:bodyPr>
+          <a:lstStyle/>
+          <a:p>
+            <a:pPr marL="0" marR="0" lvl="0" indent="0" algn="ctr" defTabSz="914400" rtl="0" eaLnBrk="1" fontAlgn="auto" latinLnBrk="0" hangingPunct="1">
+              <a:lnSpc>
+                <a:spcPct val="90000"/>
+              </a:lnSpc>
+              <a:spcBef>
+                <a:spcPts val="0"/>
+              </a:spcBef>
+              <a:spcAft>
+                <a:spcPts val="600"/>
+              </a:spcAft>
+              <a:buClrTx/>
+              <a:buSzTx/>
+              <a:buFontTx/>
+              <a:buNone/>
+              <a:tabLst/>
+              <a:defRPr/>
+            </a:pPr>
+            <a:r>
+              <a:rPr kumimoji="0" lang="en-US" sz="1200" b="0" i="0" u="none" strike="noStrike" kern="1200" cap="none" spc="0" normalizeH="0" baseline="0" noProof="0">
+                <a:ln>
+                  <a:noFill/>
+                </a:ln>
+                <a:solidFill>
+                  <a:prstClr val="black">
+                    <a:tint val="75000"/>
+                  </a:prstClr>
+                </a:solidFill>
+                <a:effectLst/>
+                <a:uLnTx/>
+                <a:uFillTx/>
+                <a:latin typeface="Calibri"/>
+                <a:ea typeface="+mn-ea"/>
+                <a:cs typeface="+mn-cs"/>
+              </a:rPr>
+              <a:t>www.anubhavtrainings.com</a:t>
+            </a:r>
+          </a:p>
+        </p:txBody>
+      </p:sp>
+      <p:sp>
+        <p:nvSpPr>
+          <p:cNvPr id="4" name="Slide Number Placeholder 3">
+            <a:extLst>
+              <a:ext uri="{FF2B5EF4-FFF2-40B4-BE49-F238E27FC236}">
+                <a16:creationId xmlns:a16="http://schemas.microsoft.com/office/drawing/2014/main" id="{5480D719-56E6-7388-1975-496284E4891B}"/>
+              </a:ext>
+            </a:extLst>
+          </p:cNvPr>
+          <p:cNvSpPr>
+            <a:spLocks noGrp="1"/>
+          </p:cNvSpPr>
+          <p:nvPr>
+            <p:ph type="sldNum" sz="quarter" idx="12"/>
+          </p:nvPr>
+        </p:nvSpPr>
+        <p:spPr>
+          <a:xfrm>
+            <a:off x="6553200" y="4767263"/>
+            <a:ext cx="2133600" cy="273844"/>
+          </a:xfrm>
+        </p:spPr>
+        <p:txBody>
+          <a:bodyPr vert="horz" lIns="91440" tIns="45720" rIns="91440" bIns="45720" rtlCol="0" anchor="ctr">
+            <a:normAutofit/>
+          </a:bodyPr>
+          <a:lstStyle/>
+          <a:p>
+            <a:pPr marL="0" marR="0" lvl="0" indent="0" algn="r" defTabSz="914400" rtl="0" eaLnBrk="1" fontAlgn="auto" latinLnBrk="0" hangingPunct="1">
+              <a:lnSpc>
+                <a:spcPct val="90000"/>
+              </a:lnSpc>
+              <a:spcBef>
+                <a:spcPts val="0"/>
+              </a:spcBef>
+              <a:spcAft>
+                <a:spcPts val="600"/>
+              </a:spcAft>
+              <a:buClrTx/>
+              <a:buSzTx/>
+              <a:buFontTx/>
+              <a:buNone/>
+              <a:tabLst/>
+              <a:defRPr/>
+            </a:pPr>
+            <a:fld id="{B6F15528-21DE-4FAA-801E-634DDDAF4B2B}" type="slidenum">
+              <a:rPr kumimoji="0" lang="en-US" sz="1200" b="0" i="0" u="none" strike="noStrike" kern="1200" cap="none" spc="0" normalizeH="0" baseline="0" noProof="0" smtClean="0">
+                <a:ln>
+                  <a:noFill/>
+                </a:ln>
+                <a:solidFill>
+                  <a:prstClr val="black">
+                    <a:tint val="75000"/>
+                  </a:prstClr>
+                </a:solidFill>
+                <a:effectLst/>
+                <a:uLnTx/>
+                <a:uFillTx/>
+                <a:latin typeface="Calibri"/>
+                <a:ea typeface="+mn-ea"/>
+                <a:cs typeface="+mn-cs"/>
+              </a:rPr>
+              <a:pPr marL="0" marR="0" lvl="0" indent="0" algn="r" defTabSz="914400" rtl="0" eaLnBrk="1" fontAlgn="auto" latinLnBrk="0" hangingPunct="1">
+                <a:lnSpc>
+                  <a:spcPct val="90000"/>
+                </a:lnSpc>
+                <a:spcBef>
+                  <a:spcPts val="0"/>
+                </a:spcBef>
+                <a:spcAft>
+                  <a:spcPts val="600"/>
+                </a:spcAft>
+                <a:buClrTx/>
+                <a:buSzTx/>
+                <a:buFontTx/>
+                <a:buNone/>
+                <a:tabLst/>
+                <a:defRPr/>
+              </a:pPr>
+              <a:t>4</a:t>
+            </a:fld>
+            <a:endParaRPr kumimoji="0" lang="en-US" sz="1200" b="0" i="0" u="none" strike="noStrike" kern="1200" cap="none" spc="0" normalizeH="0" baseline="0" noProof="0">
+              <a:ln>
+                <a:noFill/>
+              </a:ln>
+              <a:solidFill>
+                <a:prstClr val="black">
+                  <a:tint val="75000"/>
+                </a:prstClr>
+              </a:solidFill>
+              <a:effectLst/>
+              <a:uLnTx/>
+              <a:uFillTx/>
+              <a:latin typeface="Calibri"/>
+              <a:ea typeface="+mn-ea"/>
+              <a:cs typeface="+mn-cs"/>
+            </a:endParaRPr>
+          </a:p>
+        </p:txBody>
+      </p:sp>
+      <p:sp>
+        <p:nvSpPr>
+          <p:cNvPr id="2" name="TextBox 1">
+            <a:extLst>
+              <a:ext uri="{FF2B5EF4-FFF2-40B4-BE49-F238E27FC236}">
+                <a16:creationId xmlns:a16="http://schemas.microsoft.com/office/drawing/2014/main" id="{C738EB7F-46F2-0708-6567-C2DA558B021D}"/>
+              </a:ext>
+            </a:extLst>
+          </p:cNvPr>
+          <p:cNvSpPr txBox="1"/>
+          <p:nvPr/>
+        </p:nvSpPr>
+        <p:spPr>
+          <a:xfrm>
+            <a:off x="457200" y="971550"/>
+            <a:ext cx="4038600" cy="3657600"/>
+          </a:xfrm>
+          <a:prstGeom prst="rect">
+            <a:avLst/>
+          </a:prstGeom>
+        </p:spPr>
+        <p:txBody>
+          <a:bodyPr vert="horz" lIns="91440" tIns="45720" rIns="91440" bIns="45720" rtlCol="0">
+            <a:normAutofit/>
+          </a:bodyPr>
+          <a:lstStyle/>
+          <a:p>
+            <a:pPr marL="0" marR="0" lvl="0" indent="0" algn="l" defTabSz="914400" rtl="0" eaLnBrk="1" fontAlgn="auto" latinLnBrk="0" hangingPunct="1">
+              <a:lnSpc>
+                <a:spcPct val="100000"/>
+              </a:lnSpc>
+              <a:spcBef>
+                <a:spcPct val="20000"/>
+              </a:spcBef>
+              <a:spcAft>
+                <a:spcPts val="0"/>
+              </a:spcAft>
+              <a:buClrTx/>
+              <a:buSzTx/>
+              <a:buFont typeface="Arial" pitchFamily="34" charset="0"/>
+              <a:buNone/>
+              <a:tabLst/>
+              <a:defRPr/>
+            </a:pPr>
+            <a:r>
+              <a:rPr kumimoji="0" lang="en-US" sz="1400" b="0" i="0" u="none" strike="noStrike" kern="1200" cap="none" spc="0" normalizeH="0" baseline="0" noProof="0" dirty="0">
+                <a:ln>
+                  <a:noFill/>
+                </a:ln>
+                <a:solidFill>
+                  <a:prstClr val="black"/>
+                </a:solidFill>
+                <a:effectLst/>
+                <a:uLnTx/>
+                <a:uFillTx/>
+                <a:latin typeface="Calibri"/>
+                <a:ea typeface="+mn-ea"/>
+                <a:cs typeface="+mn-cs"/>
+              </a:rPr>
+              <a:t>Neha is working as a sales representative in the sales department. She would like to prepare an excel of all the sales data present in SAP Fiori Application.</a:t>
+            </a:r>
+          </a:p>
+          <a:p>
+            <a:pPr marL="0" marR="0" lvl="0" indent="0" algn="l" defTabSz="914400" rtl="0" eaLnBrk="1" fontAlgn="auto" latinLnBrk="0" hangingPunct="1">
+              <a:lnSpc>
+                <a:spcPct val="100000"/>
+              </a:lnSpc>
+              <a:spcBef>
+                <a:spcPct val="20000"/>
+              </a:spcBef>
+              <a:spcAft>
+                <a:spcPts val="0"/>
+              </a:spcAft>
+              <a:buClrTx/>
+              <a:buSzTx/>
+              <a:buFont typeface="Arial" pitchFamily="34" charset="0"/>
+              <a:buNone/>
+              <a:tabLst/>
+              <a:defRPr/>
+            </a:pPr>
+            <a:endParaRPr kumimoji="0" lang="en-US" sz="1400" b="0" i="0" u="none" strike="noStrike" kern="1200" cap="none" spc="0" normalizeH="0" baseline="0" noProof="0" dirty="0">
+              <a:ln>
+                <a:noFill/>
+              </a:ln>
+              <a:solidFill>
+                <a:prstClr val="black"/>
+              </a:solidFill>
+              <a:effectLst/>
+              <a:uLnTx/>
+              <a:uFillTx/>
+              <a:latin typeface="Calibri"/>
+              <a:ea typeface="+mn-ea"/>
+              <a:cs typeface="+mn-cs"/>
+            </a:endParaRPr>
+          </a:p>
+          <a:p>
+            <a:pPr marL="0" marR="0" lvl="0" indent="0" algn="l" defTabSz="914400" rtl="0" eaLnBrk="1" fontAlgn="auto" latinLnBrk="0" hangingPunct="1">
+              <a:lnSpc>
+                <a:spcPct val="100000"/>
+              </a:lnSpc>
+              <a:spcBef>
+                <a:spcPct val="20000"/>
+              </a:spcBef>
+              <a:spcAft>
+                <a:spcPts val="0"/>
+              </a:spcAft>
+              <a:buClrTx/>
+              <a:buSzTx/>
+              <a:buFont typeface="Arial" pitchFamily="34" charset="0"/>
+              <a:buNone/>
+              <a:tabLst/>
+              <a:defRPr/>
+            </a:pPr>
+            <a:r>
+              <a:rPr kumimoji="0" lang="en-US" sz="1400" b="0" i="0" u="none" strike="noStrike" kern="1200" cap="none" spc="0" normalizeH="0" baseline="0" noProof="0" dirty="0">
+                <a:ln>
+                  <a:noFill/>
+                </a:ln>
+                <a:solidFill>
+                  <a:prstClr val="black"/>
+                </a:solidFill>
+                <a:effectLst/>
+                <a:uLnTx/>
+                <a:uFillTx/>
+                <a:latin typeface="Calibri"/>
+                <a:ea typeface="+mn-ea"/>
+                <a:cs typeface="+mn-cs"/>
+              </a:rPr>
+              <a:t>The Sales order Fiori app contains the order header and order item details along with customer data.</a:t>
+            </a:r>
+          </a:p>
+          <a:p>
+            <a:pPr marL="0" marR="0" lvl="0" indent="0" algn="l" defTabSz="914400" rtl="0" eaLnBrk="1" fontAlgn="auto" latinLnBrk="0" hangingPunct="1">
+              <a:lnSpc>
+                <a:spcPct val="100000"/>
+              </a:lnSpc>
+              <a:spcBef>
+                <a:spcPct val="20000"/>
+              </a:spcBef>
+              <a:spcAft>
+                <a:spcPts val="0"/>
+              </a:spcAft>
+              <a:buClrTx/>
+              <a:buSzTx/>
+              <a:buFont typeface="Arial" pitchFamily="34" charset="0"/>
+              <a:buNone/>
+              <a:tabLst/>
+              <a:defRPr/>
+            </a:pPr>
+            <a:endParaRPr kumimoji="0" lang="en-US" sz="1400" b="0" i="0" u="none" strike="noStrike" kern="1200" cap="none" spc="0" normalizeH="0" baseline="0" noProof="0" dirty="0">
+              <a:ln>
+                <a:noFill/>
+              </a:ln>
+              <a:solidFill>
+                <a:prstClr val="black"/>
+              </a:solidFill>
+              <a:effectLst/>
+              <a:uLnTx/>
+              <a:uFillTx/>
+              <a:latin typeface="Calibri"/>
+              <a:ea typeface="+mn-ea"/>
+              <a:cs typeface="+mn-cs"/>
+            </a:endParaRPr>
+          </a:p>
+          <a:p>
+            <a:pPr marL="0" marR="0" lvl="0" indent="0" algn="l" defTabSz="914400" rtl="0" eaLnBrk="1" fontAlgn="auto" latinLnBrk="0" hangingPunct="1">
+              <a:lnSpc>
+                <a:spcPct val="100000"/>
+              </a:lnSpc>
+              <a:spcBef>
+                <a:spcPct val="20000"/>
+              </a:spcBef>
+              <a:spcAft>
+                <a:spcPts val="0"/>
+              </a:spcAft>
+              <a:buClrTx/>
+              <a:buSzTx/>
+              <a:buFont typeface="Arial" pitchFamily="34" charset="0"/>
+              <a:buNone/>
+              <a:tabLst/>
+              <a:defRPr/>
+            </a:pPr>
+            <a:r>
+              <a:rPr kumimoji="0" lang="en-US" sz="1400" b="0" i="0" u="none" strike="noStrike" kern="1200" cap="none" spc="0" normalizeH="0" baseline="0" noProof="0" dirty="0">
+                <a:ln>
+                  <a:noFill/>
+                </a:ln>
+                <a:solidFill>
+                  <a:prstClr val="black"/>
+                </a:solidFill>
+                <a:effectLst/>
+                <a:uLnTx/>
+                <a:uFillTx/>
+                <a:latin typeface="Calibri"/>
+                <a:ea typeface="+mn-ea"/>
+                <a:cs typeface="+mn-cs"/>
+              </a:rPr>
+              <a:t>She open a sales order, manually copies the data from the app and fills it in excel template, once done she store the excel in her system for future reference. This is an error prone and laborious task, We want to use SAP Build to help her automating the same.</a:t>
+            </a:r>
+          </a:p>
+          <a:p>
+            <a:pPr marL="0" marR="0" lvl="0" indent="0" algn="l" defTabSz="914400" rtl="0" eaLnBrk="1" fontAlgn="auto" latinLnBrk="0" hangingPunct="1">
+              <a:lnSpc>
+                <a:spcPct val="100000"/>
+              </a:lnSpc>
+              <a:spcBef>
+                <a:spcPct val="20000"/>
+              </a:spcBef>
+              <a:spcAft>
+                <a:spcPts val="0"/>
+              </a:spcAft>
+              <a:buClrTx/>
+              <a:buSzTx/>
+              <a:buFont typeface="Arial" pitchFamily="34" charset="0"/>
+              <a:buNone/>
+              <a:tabLst/>
+              <a:defRPr/>
+            </a:pPr>
+            <a:endParaRPr kumimoji="0" lang="en-US" sz="1400" b="0" i="0" u="none" strike="noStrike" kern="1200" cap="none" spc="0" normalizeH="0" baseline="0" noProof="0" dirty="0">
+              <a:ln>
+                <a:noFill/>
+              </a:ln>
+              <a:solidFill>
+                <a:prstClr val="black"/>
+              </a:solidFill>
+              <a:effectLst/>
+              <a:uLnTx/>
+              <a:uFillTx/>
+              <a:latin typeface="Calibri"/>
+              <a:ea typeface="+mn-ea"/>
+              <a:cs typeface="+mn-cs"/>
+            </a:endParaRPr>
+          </a:p>
+          <a:p>
+            <a:pPr marL="0" marR="0" lvl="0" indent="0" algn="l" defTabSz="914400" rtl="0" eaLnBrk="1" fontAlgn="auto" latinLnBrk="0" hangingPunct="1">
+              <a:lnSpc>
+                <a:spcPct val="100000"/>
+              </a:lnSpc>
+              <a:spcBef>
+                <a:spcPct val="20000"/>
+              </a:spcBef>
+              <a:spcAft>
+                <a:spcPts val="0"/>
+              </a:spcAft>
+              <a:buClrTx/>
+              <a:buSzTx/>
+              <a:buFont typeface="Arial" pitchFamily="34" charset="0"/>
+              <a:buNone/>
+              <a:tabLst/>
+              <a:defRPr/>
+            </a:pPr>
+            <a:r>
+              <a:rPr kumimoji="0" lang="en-US" sz="1400" b="0" i="0" u="none" strike="noStrike" kern="1200" cap="none" spc="0" normalizeH="0" baseline="0" noProof="0" dirty="0">
+                <a:ln>
+                  <a:noFill/>
+                </a:ln>
+                <a:solidFill>
+                  <a:prstClr val="black"/>
+                </a:solidFill>
+                <a:effectLst/>
+                <a:uLnTx/>
+                <a:uFillTx/>
+                <a:latin typeface="Calibri"/>
+                <a:ea typeface="+mn-ea"/>
+                <a:cs typeface="+mn-cs"/>
+                <a:hlinkClick r:id="rId2"/>
+              </a:rPr>
+              <a:t>Here is the Sales Order Manage App</a:t>
+            </a:r>
+            <a:endParaRPr kumimoji="0" lang="en-US" sz="1400" b="0" i="0" u="none" strike="noStrike" kern="1200" cap="none" spc="0" normalizeH="0" baseline="0" noProof="0" dirty="0">
+              <a:ln>
+                <a:noFill/>
+              </a:ln>
+              <a:solidFill>
+                <a:prstClr val="black"/>
+              </a:solidFill>
+              <a:effectLst/>
+              <a:uLnTx/>
+              <a:uFillTx/>
+              <a:latin typeface="Calibri"/>
+              <a:ea typeface="+mn-ea"/>
+              <a:cs typeface="+mn-cs"/>
+            </a:endParaRPr>
+          </a:p>
+        </p:txBody>
+      </p:sp>
+      <p:pic>
+        <p:nvPicPr>
+          <p:cNvPr id="6" name="Picture 2" descr="A person smiling at camera&#10;&#10;Description automatically generated">
+            <a:extLst>
+              <a:ext uri="{FF2B5EF4-FFF2-40B4-BE49-F238E27FC236}">
+                <a16:creationId xmlns:a16="http://schemas.microsoft.com/office/drawing/2014/main" id="{E8E1C38E-EADB-4549-AEFF-02B4BC1D5E8E}"/>
+              </a:ext>
+            </a:extLst>
+          </p:cNvPr>
+          <p:cNvPicPr>
+            <a:picLocks noChangeAspect="1" noChangeArrowheads="1"/>
+          </p:cNvPicPr>
+          <p:nvPr/>
+        </p:nvPicPr>
+        <p:blipFill>
+          <a:blip r:embed="rId3">
+            <a:extLst>
+              <a:ext uri="{28A0092B-C50C-407E-A947-70E740481C1C}">
+                <a14:useLocalDpi xmlns:a14="http://schemas.microsoft.com/office/drawing/2010/main" val="0"/>
+              </a:ext>
+            </a:extLst>
+          </a:blip>
+          <a:srcRect l="21396" r="23396"/>
+          <a:stretch/>
+        </p:blipFill>
+        <p:spPr bwMode="auto">
+          <a:xfrm>
+            <a:off x="4648200" y="971550"/>
+            <a:ext cx="4038600" cy="3657600"/>
+          </a:xfrm>
+          <a:prstGeom prst="rect">
+            <a:avLst/>
+          </a:prstGeom>
+          <a:solidFill>
+            <a:srgbClr val="FFFFFF"/>
+          </a:solidFill>
+        </p:spPr>
+      </p:pic>
+    </p:spTree>
+    <p:extLst>
+      <p:ext uri="{BB962C8B-B14F-4D97-AF65-F5344CB8AC3E}">
+        <p14:creationId xmlns:p14="http://schemas.microsoft.com/office/powerpoint/2010/main" val="881055513"/>
+      </p:ext>
+    </p:extLst>
+  </p:cSld>
+  <p:clrMapOvr>
+    <a:masterClrMapping/>
+  </p:clrMapOvr>
+  <mc:AlternateContent xmlns:mc="http://schemas.openxmlformats.org/markup-compatibility/2006" xmlns:p14="http://schemas.microsoft.com/office/powerpoint/2010/main">
+    <mc:Choice Requires="p14">
+      <p:transition spd="med" p14:dur="700">
+        <p:fade/>
+      </p:transition>
+    </mc:Choice>
+    <mc:Fallback xmlns="">
+      <p:transition spd="med">
+        <p:fade/>
+      </p:transition>
+    </mc:Fallback>
+  </mc:AlternateContent>
+</p:sld>
+</file>
+
+<file path=ppt/slides/slide5.xml><?xml version="1.0" encoding="utf-8"?>
+<p:sld xmlns:a="http://schemas.openxmlformats.org/drawingml/2006/main" xmlns:r="http://schemas.openxmlformats.org/officeDocument/2006/relationships" xmlns:p="http://schemas.openxmlformats.org/presentationml/2006/main">
+  <p:cSld>
+    <p:spTree>
+      <p:nvGrpSpPr>
+        <p:cNvPr id="1" name="">
+          <a:extLst>
+            <a:ext uri="{FF2B5EF4-FFF2-40B4-BE49-F238E27FC236}">
               <a16:creationId xmlns:a16="http://schemas.microsoft.com/office/drawing/2014/main" id="{24F8DC62-5BB8-0B7A-EBFB-531DE585A9EA}"/>
             </a:ext>
           </a:extLst>
@@ -9482,7 +10056,7 @@
             <a:fld id="{B6F15528-21DE-4FAA-801E-634DDDAF4B2B}" type="slidenum">
               <a:rPr lang="en-US" smtClean="0"/>
               <a:pPr/>
-              <a:t>4</a:t>
+              <a:t>5</a:t>
             </a:fld>
             <a:endParaRPr lang="en-US" dirty="0"/>
           </a:p>
@@ -9940,7 +10514,7 @@
 </p:sld>
 </file>
 
-<file path=ppt/slides/slide5.xml><?xml version="1.0" encoding="utf-8"?>
+<file path=ppt/slides/slide6.xml><?xml version="1.0" encoding="utf-8"?>
 <p:sld xmlns:a="http://schemas.openxmlformats.org/drawingml/2006/main" xmlns:r="http://schemas.openxmlformats.org/officeDocument/2006/relationships" xmlns:p="http://schemas.openxmlformats.org/presentationml/2006/main">
   <p:cSld>
     <p:spTree>
@@ -10020,7 +10594,7 @@
             <a:fld id="{B6F15528-21DE-4FAA-801E-634DDDAF4B2B}" type="slidenum">
               <a:rPr lang="en-US" smtClean="0"/>
               <a:pPr/>
-              <a:t>5</a:t>
+              <a:t>6</a:t>
             </a:fld>
             <a:endParaRPr lang="en-US" dirty="0"/>
           </a:p>
@@ -10397,7 +10971,7 @@
 </p:sld>
 </file>
 
-<file path=ppt/slides/slide6.xml><?xml version="1.0" encoding="utf-8"?>
+<file path=ppt/slides/slide7.xml><?xml version="1.0" encoding="utf-8"?>
 <p:sld xmlns:a="http://schemas.openxmlformats.org/drawingml/2006/main" xmlns:r="http://schemas.openxmlformats.org/officeDocument/2006/relationships" xmlns:p="http://schemas.openxmlformats.org/presentationml/2006/main">
   <p:cSld>
     <p:spTree>
@@ -10550,7 +11124,7 @@
                   <a:spcPts val="600"/>
                 </a:spcAft>
               </a:pPr>
-              <a:t>6</a:t>
+              <a:t>7</a:t>
             </a:fld>
             <a:endParaRPr lang="en-US"/>
           </a:p>
@@ -10712,271 +11286,6 @@
     <p:extLst>
       <p:ext uri="{BB962C8B-B14F-4D97-AF65-F5344CB8AC3E}">
         <p14:creationId xmlns:p14="http://schemas.microsoft.com/office/powerpoint/2010/main" val="3678295053"/>
-      </p:ext>
-    </p:extLst>
-  </p:cSld>
-  <p:clrMapOvr>
-    <a:masterClrMapping/>
-  </p:clrMapOvr>
-  <mc:AlternateContent xmlns:mc="http://schemas.openxmlformats.org/markup-compatibility/2006" xmlns:p14="http://schemas.microsoft.com/office/powerpoint/2010/main">
-    <mc:Choice Requires="p14">
-      <p:transition spd="med" p14:dur="700">
-        <p:fade/>
-      </p:transition>
-    </mc:Choice>
-    <mc:Fallback xmlns="">
-      <p:transition spd="med">
-        <p:fade/>
-      </p:transition>
-    </mc:Fallback>
-  </mc:AlternateContent>
-</p:sld>
-</file>
-
-<file path=ppt/slides/slide7.xml><?xml version="1.0" encoding="utf-8"?>
-<p:sld xmlns:a="http://schemas.openxmlformats.org/drawingml/2006/main" xmlns:r="http://schemas.openxmlformats.org/officeDocument/2006/relationships" xmlns:p="http://schemas.openxmlformats.org/presentationml/2006/main">
-  <p:cSld>
-    <p:spTree>
-      <p:nvGrpSpPr>
-        <p:cNvPr id="1" name="">
-          <a:extLst>
-            <a:ext uri="{FF2B5EF4-FFF2-40B4-BE49-F238E27FC236}">
-              <a16:creationId xmlns:a16="http://schemas.microsoft.com/office/drawing/2014/main" id="{F2C2A59A-307B-37B8-9914-2C0A7843909A}"/>
-            </a:ext>
-          </a:extLst>
-        </p:cNvPr>
-        <p:cNvGrpSpPr/>
-        <p:nvPr/>
-      </p:nvGrpSpPr>
-      <p:grpSpPr>
-        <a:xfrm>
-          <a:off x="0" y="0"/>
-          <a:ext cx="0" cy="0"/>
-          <a:chOff x="0" y="0"/>
-          <a:chExt cx="0" cy="0"/>
-        </a:xfrm>
-      </p:grpSpPr>
-      <p:sp>
-        <p:nvSpPr>
-          <p:cNvPr id="2" name="Title 1">
-            <a:extLst>
-              <a:ext uri="{FF2B5EF4-FFF2-40B4-BE49-F238E27FC236}">
-                <a16:creationId xmlns:a16="http://schemas.microsoft.com/office/drawing/2014/main" id="{7F67DF8E-170F-3DC1-F473-404DCDC65CF7}"/>
-              </a:ext>
-            </a:extLst>
-          </p:cNvPr>
-          <p:cNvSpPr>
-            <a:spLocks noGrp="1"/>
-          </p:cNvSpPr>
-          <p:nvPr>
-            <p:ph type="title"/>
-          </p:nvPr>
-        </p:nvSpPr>
-        <p:spPr>
-          <a:xfrm>
-            <a:off x="990600" y="971550"/>
-            <a:ext cx="8001000" cy="425054"/>
-          </a:xfrm>
-        </p:spPr>
-        <p:txBody>
-          <a:bodyPr/>
-          <a:lstStyle/>
-          <a:p>
-            <a:r>
-              <a:rPr lang="en-IN" sz="2400" dirty="0">
-                <a:latin typeface="Cooper Black" panose="0208090404030B020404" pitchFamily="18" charset="0"/>
-              </a:rPr>
-              <a:t>Chapter 19: Working with cloud Connector</a:t>
-            </a:r>
-          </a:p>
-        </p:txBody>
-      </p:sp>
-      <p:sp>
-        <p:nvSpPr>
-          <p:cNvPr id="4" name="Text Placeholder 3">
-            <a:extLst>
-              <a:ext uri="{FF2B5EF4-FFF2-40B4-BE49-F238E27FC236}">
-                <a16:creationId xmlns:a16="http://schemas.microsoft.com/office/drawing/2014/main" id="{F55EA630-FFE2-C40B-9B60-5A412634FBAF}"/>
-              </a:ext>
-            </a:extLst>
-          </p:cNvPr>
-          <p:cNvSpPr>
-            <a:spLocks noGrp="1"/>
-          </p:cNvSpPr>
-          <p:nvPr>
-            <p:ph type="body" sz="half" idx="2"/>
-          </p:nvPr>
-        </p:nvSpPr>
-        <p:spPr>
-          <a:xfrm>
-            <a:off x="1066800" y="1500783"/>
-            <a:ext cx="7848600" cy="3204567"/>
-          </a:xfrm>
-        </p:spPr>
-        <p:txBody>
-          <a:bodyPr>
-            <a:normAutofit/>
-          </a:bodyPr>
-          <a:lstStyle/>
-          <a:p>
-            <a:pPr marL="285750" indent="-285750">
-              <a:buFont typeface="Arial" panose="020B0604020202020204" pitchFamily="34" charset="0"/>
-              <a:buChar char="•"/>
-            </a:pPr>
-            <a:r>
-              <a:rPr lang="en-IN" dirty="0"/>
-              <a:t>What is cloud connector</a:t>
-            </a:r>
-          </a:p>
-          <a:p>
-            <a:pPr marL="285750" indent="-285750">
-              <a:buFont typeface="Arial" panose="020B0604020202020204" pitchFamily="34" charset="0"/>
-              <a:buChar char="•"/>
-            </a:pPr>
-            <a:r>
-              <a:rPr lang="en-IN" dirty="0"/>
-              <a:t>Why we need the cloud connector</a:t>
-            </a:r>
-          </a:p>
-          <a:p>
-            <a:pPr marL="285750" indent="-285750">
-              <a:buFont typeface="Arial" panose="020B0604020202020204" pitchFamily="34" charset="0"/>
-              <a:buChar char="•"/>
-            </a:pPr>
-            <a:r>
-              <a:rPr lang="en-IN" dirty="0"/>
-              <a:t>How to identify the details of your SAP S/4HANA backend system</a:t>
-            </a:r>
-          </a:p>
-          <a:p>
-            <a:pPr marL="285750" indent="-285750">
-              <a:buFont typeface="Arial" panose="020B0604020202020204" pitchFamily="34" charset="0"/>
-              <a:buChar char="•"/>
-            </a:pPr>
-            <a:r>
-              <a:rPr lang="en-IN" dirty="0"/>
-              <a:t>Installing cloud connector</a:t>
-            </a:r>
-          </a:p>
-          <a:p>
-            <a:pPr marL="285750" indent="-285750">
-              <a:buFont typeface="Arial" panose="020B0604020202020204" pitchFamily="34" charset="0"/>
-              <a:buChar char="•"/>
-            </a:pPr>
-            <a:r>
-              <a:rPr lang="en-IN" dirty="0"/>
-              <a:t>Connect to your backend system</a:t>
-            </a:r>
-          </a:p>
-          <a:p>
-            <a:pPr marL="285750" indent="-285750">
-              <a:buFont typeface="Arial" panose="020B0604020202020204" pitchFamily="34" charset="0"/>
-              <a:buChar char="•"/>
-            </a:pPr>
-            <a:r>
-              <a:rPr lang="en-IN" dirty="0"/>
-              <a:t>Register CC to SAP BTP Account and check</a:t>
-            </a:r>
-          </a:p>
-          <a:p>
-            <a:pPr marL="285750" indent="-285750">
-              <a:buFont typeface="Arial" panose="020B0604020202020204" pitchFamily="34" charset="0"/>
-              <a:buChar char="•"/>
-            </a:pPr>
-            <a:r>
-              <a:rPr lang="en-IN" dirty="0"/>
-              <a:t>Adding backend system for handshake</a:t>
-            </a:r>
-          </a:p>
-          <a:p>
-            <a:pPr marL="285750" indent="-285750">
-              <a:buFont typeface="Arial" panose="020B0604020202020204" pitchFamily="34" charset="0"/>
-              <a:buChar char="•"/>
-            </a:pPr>
-            <a:r>
-              <a:rPr lang="en-IN" dirty="0"/>
-              <a:t>Testing the CC connection</a:t>
-            </a:r>
-          </a:p>
-          <a:p>
-            <a:pPr marL="285750" indent="-285750">
-              <a:buFont typeface="Arial" panose="020B0604020202020204" pitchFamily="34" charset="0"/>
-              <a:buChar char="•"/>
-            </a:pPr>
-            <a:endParaRPr lang="en-IN" dirty="0"/>
-          </a:p>
-          <a:p>
-            <a:pPr marL="285750" indent="-285750">
-              <a:buFont typeface="Arial" panose="020B0604020202020204" pitchFamily="34" charset="0"/>
-              <a:buChar char="•"/>
-            </a:pPr>
-            <a:endParaRPr lang="en-IN" dirty="0"/>
-          </a:p>
-        </p:txBody>
-      </p:sp>
-      <p:sp>
-        <p:nvSpPr>
-          <p:cNvPr id="5" name="Footer Placeholder 4">
-            <a:extLst>
-              <a:ext uri="{FF2B5EF4-FFF2-40B4-BE49-F238E27FC236}">
-                <a16:creationId xmlns:a16="http://schemas.microsoft.com/office/drawing/2014/main" id="{C9B4BB92-534F-9631-E606-34C798F8334A}"/>
-              </a:ext>
-            </a:extLst>
-          </p:cNvPr>
-          <p:cNvSpPr>
-            <a:spLocks noGrp="1"/>
-          </p:cNvSpPr>
-          <p:nvPr>
-            <p:ph type="ftr" sz="quarter" idx="11"/>
-          </p:nvPr>
-        </p:nvSpPr>
-        <p:spPr/>
-        <p:txBody>
-          <a:bodyPr/>
-          <a:lstStyle/>
-          <a:p>
-            <a:r>
-              <a:rPr lang="en-US"/>
-              <a:t>www.anubhavtrainings.com</a:t>
-            </a:r>
-            <a:endParaRPr lang="en-US" dirty="0"/>
-          </a:p>
-        </p:txBody>
-      </p:sp>
-      <p:sp>
-        <p:nvSpPr>
-          <p:cNvPr id="6" name="Slide Number Placeholder 5">
-            <a:extLst>
-              <a:ext uri="{FF2B5EF4-FFF2-40B4-BE49-F238E27FC236}">
-                <a16:creationId xmlns:a16="http://schemas.microsoft.com/office/drawing/2014/main" id="{03D5155E-EEBF-615F-CBEE-945FA53288FE}"/>
-              </a:ext>
-            </a:extLst>
-          </p:cNvPr>
-          <p:cNvSpPr>
-            <a:spLocks noGrp="1"/>
-          </p:cNvSpPr>
-          <p:nvPr>
-            <p:ph type="sldNum" sz="quarter" idx="12"/>
-          </p:nvPr>
-        </p:nvSpPr>
-        <p:spPr/>
-        <p:txBody>
-          <a:bodyPr/>
-          <a:lstStyle/>
-          <a:p>
-            <a:fld id="{B6F15528-21DE-4FAA-801E-634DDDAF4B2B}" type="slidenum">
-              <a:rPr lang="en-US" smtClean="0"/>
-              <a:pPr/>
-              <a:t>7</a:t>
-            </a:fld>
-            <a:endParaRPr lang="en-US"/>
-          </a:p>
-        </p:txBody>
-      </p:sp>
-    </p:spTree>
-    <p:extLst>
-      <p:ext uri="{BB962C8B-B14F-4D97-AF65-F5344CB8AC3E}">
-        <p14:creationId xmlns:p14="http://schemas.microsoft.com/office/powerpoint/2010/main" val="2597404840"/>
       </p:ext>
     </p:extLst>
   </p:cSld>
